--- a/app/doc_templates/Presentation_template_1.pptx
+++ b/app/doc_templates/Presentation_template_1.pptx
@@ -1964,182 +1964,6 @@
               <a:uLnTx/>
               <a:uFillTx/>
               <a:latin typeface="Franklin Gothic Demi" panose="020B0703020102020204" pitchFamily="34" charset="0"/>
-              <a:ea typeface="+mn-ea"/>
-              <a:cs typeface="+mn-cs"/>
-            </a:endParaRPr>
-          </a:p>
-        </p:txBody>
-      </p:sp>
-      <p:sp>
-        <p:nvSpPr>
-          <p:cNvPr id="14" name="Segnaposto piè di pagina 8">
-            <a:extLst>
-              <a:ext uri="{FF2B5EF4-FFF2-40B4-BE49-F238E27FC236}">
-                <a16:creationId xmlns:a16="http://schemas.microsoft.com/office/drawing/2014/main" id="{B4BD5F86-CB97-4F4B-B706-67993737E45A}"/>
-              </a:ext>
-            </a:extLst>
-          </p:cNvPr>
-          <p:cNvSpPr txBox="1">
-            <a:spLocks/>
-          </p:cNvSpPr>
-          <p:nvPr userDrawn="1"/>
-        </p:nvSpPr>
-        <p:spPr>
-          <a:xfrm>
-            <a:off x="369551" y="4782609"/>
-            <a:ext cx="1514933" cy="366183"/>
-          </a:xfrm>
-          <a:prstGeom prst="rect">
-            <a:avLst/>
-          </a:prstGeom>
-        </p:spPr>
-        <p:txBody>
-          <a:bodyPr/>
-          <a:lstStyle>
-            <a:defPPr>
-              <a:defRPr lang="it-IT"/>
-            </a:defPPr>
-            <a:lvl1pPr marL="0" algn="l" defTabSz="685800" rtl="0" eaLnBrk="1" latinLnBrk="0" hangingPunct="1">
-              <a:defRPr sz="1350" kern="1200">
-                <a:solidFill>
-                  <a:schemeClr val="tx1"/>
-                </a:solidFill>
-                <a:latin typeface="+mn-lt"/>
-                <a:ea typeface="+mn-ea"/>
-                <a:cs typeface="+mn-cs"/>
-              </a:defRPr>
-            </a:lvl1pPr>
-            <a:lvl2pPr marL="342900" algn="l" defTabSz="685800" rtl="0" eaLnBrk="1" latinLnBrk="0" hangingPunct="1">
-              <a:defRPr sz="1350" kern="1200">
-                <a:solidFill>
-                  <a:schemeClr val="tx1"/>
-                </a:solidFill>
-                <a:latin typeface="+mn-lt"/>
-                <a:ea typeface="+mn-ea"/>
-                <a:cs typeface="+mn-cs"/>
-              </a:defRPr>
-            </a:lvl2pPr>
-            <a:lvl3pPr marL="685800" algn="l" defTabSz="685800" rtl="0" eaLnBrk="1" latinLnBrk="0" hangingPunct="1">
-              <a:defRPr sz="1350" kern="1200">
-                <a:solidFill>
-                  <a:schemeClr val="tx1"/>
-                </a:solidFill>
-                <a:latin typeface="+mn-lt"/>
-                <a:ea typeface="+mn-ea"/>
-                <a:cs typeface="+mn-cs"/>
-              </a:defRPr>
-            </a:lvl3pPr>
-            <a:lvl4pPr marL="1028700" algn="l" defTabSz="685800" rtl="0" eaLnBrk="1" latinLnBrk="0" hangingPunct="1">
-              <a:defRPr sz="1350" kern="1200">
-                <a:solidFill>
-                  <a:schemeClr val="tx1"/>
-                </a:solidFill>
-                <a:latin typeface="+mn-lt"/>
-                <a:ea typeface="+mn-ea"/>
-                <a:cs typeface="+mn-cs"/>
-              </a:defRPr>
-            </a:lvl4pPr>
-            <a:lvl5pPr marL="1371600" algn="l" defTabSz="685800" rtl="0" eaLnBrk="1" latinLnBrk="0" hangingPunct="1">
-              <a:defRPr sz="1350" kern="1200">
-                <a:solidFill>
-                  <a:schemeClr val="tx1"/>
-                </a:solidFill>
-                <a:latin typeface="+mn-lt"/>
-                <a:ea typeface="+mn-ea"/>
-                <a:cs typeface="+mn-cs"/>
-              </a:defRPr>
-            </a:lvl5pPr>
-            <a:lvl6pPr marL="1714500" algn="l" defTabSz="685800" rtl="0" eaLnBrk="1" latinLnBrk="0" hangingPunct="1">
-              <a:defRPr sz="1350" kern="1200">
-                <a:solidFill>
-                  <a:schemeClr val="tx1"/>
-                </a:solidFill>
-                <a:latin typeface="+mn-lt"/>
-                <a:ea typeface="+mn-ea"/>
-                <a:cs typeface="+mn-cs"/>
-              </a:defRPr>
-            </a:lvl6pPr>
-            <a:lvl7pPr marL="2057400" algn="l" defTabSz="685800" rtl="0" eaLnBrk="1" latinLnBrk="0" hangingPunct="1">
-              <a:defRPr sz="1350" kern="1200">
-                <a:solidFill>
-                  <a:schemeClr val="tx1"/>
-                </a:solidFill>
-                <a:latin typeface="+mn-lt"/>
-                <a:ea typeface="+mn-ea"/>
-                <a:cs typeface="+mn-cs"/>
-              </a:defRPr>
-            </a:lvl7pPr>
-            <a:lvl8pPr marL="2400300" algn="l" defTabSz="685800" rtl="0" eaLnBrk="1" latinLnBrk="0" hangingPunct="1">
-              <a:defRPr sz="1350" kern="1200">
-                <a:solidFill>
-                  <a:schemeClr val="tx1"/>
-                </a:solidFill>
-                <a:latin typeface="+mn-lt"/>
-                <a:ea typeface="+mn-ea"/>
-                <a:cs typeface="+mn-cs"/>
-              </a:defRPr>
-            </a:lvl8pPr>
-            <a:lvl9pPr marL="2743200" algn="l" defTabSz="685800" rtl="0" eaLnBrk="1" latinLnBrk="0" hangingPunct="1">
-              <a:defRPr sz="1350" kern="1200">
-                <a:solidFill>
-                  <a:schemeClr val="tx1"/>
-                </a:solidFill>
-                <a:latin typeface="+mn-lt"/>
-                <a:ea typeface="+mn-ea"/>
-                <a:cs typeface="+mn-cs"/>
-              </a:defRPr>
-            </a:lvl9pPr>
-          </a:lstStyle>
-          <a:p>
-            <a:pPr marL="0" marR="0" lvl="0" indent="0" algn="l" defTabSz="914377" rtl="0" eaLnBrk="1" fontAlgn="auto" latinLnBrk="0" hangingPunct="1">
-              <a:lnSpc>
-                <a:spcPct val="100000"/>
-              </a:lnSpc>
-              <a:spcBef>
-                <a:spcPts val="0"/>
-              </a:spcBef>
-              <a:spcAft>
-                <a:spcPts val="0"/>
-              </a:spcAft>
-              <a:buClrTx/>
-              <a:buSzTx/>
-              <a:buFontTx/>
-              <a:buNone/>
-              <a:tabLst/>
-              <a:defRPr/>
-            </a:pPr>
-            <a:r>
-              <a:rPr kumimoji="0" lang="en-US" sz="800" b="0" i="0" u="none" strike="noStrike" kern="1200" cap="none" spc="0" normalizeH="0" baseline="0" noProof="0" dirty="0">
-                <a:ln>
-                  <a:noFill/>
-                </a:ln>
-                <a:solidFill>
-                  <a:prstClr val="black">
-                    <a:tint val="75000"/>
-                  </a:prstClr>
-                </a:solidFill>
-                <a:effectLst/>
-                <a:uLnTx/>
-                <a:uFillTx/>
-                <a:latin typeface="Franklin Gothic Book" panose="020B0503020102020204"/>
-                <a:ea typeface="+mn-ea"/>
-                <a:cs typeface="+mn-cs"/>
-              </a:rPr>
-              <a:t>Marketing|</a:t>
-            </a:r>
-            <a:endParaRPr kumimoji="0" lang="it-IT" sz="800" b="0" i="0" u="none" strike="noStrike" kern="1200" cap="none" spc="0" normalizeH="0" baseline="0" noProof="0" dirty="0">
-              <a:ln>
-                <a:noFill/>
-              </a:ln>
-              <a:solidFill>
-                <a:prstClr val="black">
-                  <a:tint val="75000"/>
-                </a:prstClr>
-              </a:solidFill>
-              <a:effectLst/>
-              <a:uLnTx/>
-              <a:uFillTx/>
-              <a:latin typeface="Franklin Gothic Book" panose="020B0503020102020204"/>
               <a:ea typeface="+mn-ea"/>
               <a:cs typeface="+mn-cs"/>
             </a:endParaRPr>
